--- a/genetics_students_presentation.pptx
+++ b/genetics_students_presentation.pptx
@@ -3040,7 +3040,7 @@
                 <a:ea typeface="Arial" pitchFamily="34" charset="-122"/>
                 <a:cs typeface="Arial" pitchFamily="34" charset="-120"/>
               </a:rPr>
-              <a:t>גנטיקה</a:t>
+              <a:t>‫גנטיקה‬</a:t>
             </a:r>
             <a:endParaRPr lang="he-IL" sz="7200" dirty="0"/>
           </a:p>
@@ -3079,7 +3079,7 @@
                 <a:ea typeface="Arial" pitchFamily="34" charset="-122"/>
                 <a:cs typeface="Arial" pitchFamily="34" charset="-120"/>
               </a:rPr>
-              <a:t>המסע אל הצופן הסודי של החיים</a:t>
+              <a:t>‫המסע אל הצופן הסודי של החיים‬</a:t>
             </a:r>
             <a:endParaRPr lang="he-IL" sz="2800" dirty="0"/>
           </a:p>
@@ -3118,7 +3118,7 @@
                 <a:ea typeface="Arial" pitchFamily="34" charset="-122"/>
                 <a:cs typeface="Arial" pitchFamily="34" charset="-120"/>
               </a:rPr>
-              <a:t>יחידת לימוד לתלמידים  •  מדעים</a:t>
+              <a:t>‫יחידת לימוד לתלמידים  •  מדעים‬</a:t>
             </a:r>
             <a:endParaRPr lang="he-IL" sz="1600" dirty="0"/>
           </a:p>
@@ -3272,7 +3272,7 @@
                 <a:ea typeface="Arial" pitchFamily="34" charset="-122"/>
                 <a:cs typeface="Arial" pitchFamily="34" charset="-120"/>
               </a:rPr>
-              <a:t>גנטיקה בעולם האמיתי</a:t>
+              <a:t>‫גנטיקה בעולם האמיתי‬</a:t>
             </a:r>
             <a:endParaRPr lang="he-IL" sz="3200" dirty="0"/>
           </a:p>
@@ -3382,7 +3382,7 @@
                 <a:ea typeface="Arial" pitchFamily="34" charset="-122"/>
                 <a:cs typeface="Arial" pitchFamily="34" charset="-120"/>
               </a:rPr>
-              <a:t>רפואה</a:t>
+              <a:t>‫רפואה‬</a:t>
             </a:r>
             <a:endParaRPr lang="he-IL" sz="1700" dirty="0"/>
           </a:p>
@@ -3421,7 +3421,7 @@
                 <a:ea typeface="Arial" pitchFamily="34" charset="-122"/>
                 <a:cs typeface="Arial" pitchFamily="34" charset="-120"/>
               </a:rPr>
-              <a:t>בדיקות גנטיות ותרופות שמותאמות בדיוק לחולה.</a:t>
+              <a:t>‫בדיקות גנטיות ותרופות שמותאמות בדיוק לחולה.‬</a:t>
             </a:r>
             <a:endParaRPr lang="he-IL" sz="1500" dirty="0"/>
           </a:p>
@@ -3531,7 +3531,7 @@
                 <a:ea typeface="Arial" pitchFamily="34" charset="-122"/>
                 <a:cs typeface="Arial" pitchFamily="34" charset="-120"/>
               </a:rPr>
-              <a:t>חקלאות</a:t>
+              <a:t>‫חקלאות‬</a:t>
             </a:r>
             <a:endParaRPr lang="he-IL" sz="1700" dirty="0"/>
           </a:p>
@@ -3570,7 +3570,7 @@
                 <a:ea typeface="Arial" pitchFamily="34" charset="-122"/>
                 <a:cs typeface="Arial" pitchFamily="34" charset="-120"/>
               </a:rPr>
-              <a:t>גידולים שעמידים למחלות, לחום וליובש.</a:t>
+              <a:t>‫גידולים שעמידים למחלות, לחום וליובש.‬</a:t>
             </a:r>
             <a:endParaRPr lang="he-IL" sz="1500" dirty="0"/>
           </a:p>
@@ -3680,7 +3680,7 @@
                 <a:ea typeface="Arial" pitchFamily="34" charset="-122"/>
                 <a:cs typeface="Arial" pitchFamily="34" charset="-120"/>
               </a:rPr>
-              <a:t>זיהוי פלילי</a:t>
+              <a:t>‫זיהוי פלילי‬</a:t>
             </a:r>
             <a:endParaRPr lang="he-IL" sz="1700" dirty="0"/>
           </a:p>
@@ -3719,7 +3719,7 @@
                 <a:ea typeface="Arial" pitchFamily="34" charset="-122"/>
                 <a:cs typeface="Arial" pitchFamily="34" charset="-120"/>
               </a:rPr>
-              <a:t>שערה אחת מהזירה מספיקה כדי לזהות אדם.</a:t>
+              <a:t>‫שערה אחת מהזירה מספיקה כדי לזהות אדם.‬</a:t>
             </a:r>
             <a:endParaRPr lang="he-IL" sz="1500" dirty="0"/>
           </a:p>
@@ -3829,7 +3829,7 @@
                 <a:ea typeface="Arial" pitchFamily="34" charset="-122"/>
                 <a:cs typeface="Arial" pitchFamily="34" charset="-120"/>
               </a:rPr>
-              <a:t>הנדסה גנטית</a:t>
+              <a:t>‫הנדסה גנטית‬</a:t>
             </a:r>
             <a:endParaRPr lang="he-IL" sz="1700" dirty="0"/>
           </a:p>
@@ -3868,7 +3868,7 @@
                 <a:ea typeface="Arial" pitchFamily="34" charset="-122"/>
                 <a:cs typeface="Arial" pitchFamily="34" charset="-120"/>
               </a:rPr>
-              <a:t>מדענים "עורכים" גנים, למשל כדי לייצר אינסולין לחולי סוכרת.</a:t>
+              <a:t>‫מדענים "עורכים" גנים, למשל כדי לייצר אינסולין לחולי סוכרת.‬</a:t>
             </a:r>
             <a:endParaRPr lang="he-IL" sz="1500" dirty="0"/>
           </a:p>
@@ -3907,7 +3907,7 @@
                 <a:ea typeface="Arial" pitchFamily="34" charset="-122"/>
                 <a:cs typeface="Arial" pitchFamily="34" charset="-120"/>
               </a:rPr>
-              <a:t>זה בדיוק החומר שמחכה לכם בתוצרים: תוכלו לבחור נושא מהעולם האמיתי ולחקור אותו לעומק.</a:t>
+              <a:t>‫זה בדיוק החומר שמחכה לכם בתוצרים: תוכלו לבחור נושא מהעולם האמיתי ולחקור אותו לעומק.‬</a:t>
             </a:r>
             <a:endParaRPr lang="he-IL" sz="1400" dirty="0"/>
           </a:p>
@@ -4017,7 +4017,7 @@
                 <a:ea typeface="Arial" pitchFamily="34" charset="-122"/>
                 <a:cs typeface="Arial" pitchFamily="34" charset="-120"/>
               </a:rPr>
-              <a:t>לוח הבחירה: אתם מחליטים!</a:t>
+              <a:t>‫לוח הבחירה: אתם מחליטים!‬</a:t>
             </a:r>
             <a:endParaRPr lang="he-IL" sz="3200" dirty="0"/>
           </a:p>
@@ -4056,7 +4056,7 @@
                 <a:ea typeface="Arial" pitchFamily="34" charset="-122"/>
                 <a:cs typeface="Arial" pitchFamily="34" charset="-120"/>
               </a:rPr>
-              <a:t>בחרו תוצר אחד שמציג את מה שלמדתם, ועבדו לפי המחוון שתקבלו</a:t>
+              <a:t>‫בחרו תוצר אחד שמציג את מה שלמדתם, ועבדו לפי המחוון שתקבלו‬</a:t>
             </a:r>
             <a:endParaRPr lang="he-IL" sz="1600" dirty="0"/>
           </a:p>
@@ -4166,7 +4166,7 @@
                 <a:ea typeface="Arial" pitchFamily="34" charset="-122"/>
                 <a:cs typeface="Arial" pitchFamily="34" charset="-120"/>
               </a:rPr>
-              <a:t>מצגת דיגיטלית</a:t>
+              <a:t>‫מצגת דיגיטלית‬</a:t>
             </a:r>
             <a:endParaRPr lang="he-IL" sz="1550" dirty="0"/>
           </a:p>
@@ -4205,7 +4205,7 @@
                 <a:ea typeface="Arial" pitchFamily="34" charset="-122"/>
                 <a:cs typeface="Arial" pitchFamily="34" charset="-120"/>
               </a:rPr>
-              <a:t>הידע שלכם בשקופיות ברורות ומעוצבות</a:t>
+              <a:t>‫הידע שלכם בשקופיות ברורות ומעוצבות‬</a:t>
             </a:r>
             <a:endParaRPr lang="he-IL" sz="1150" dirty="0"/>
           </a:p>
@@ -4315,7 +4315,7 @@
                 <a:ea typeface="Arial" pitchFamily="34" charset="-122"/>
                 <a:cs typeface="Arial" pitchFamily="34" charset="-120"/>
               </a:rPr>
-              <a:t>סרטון</a:t>
+              <a:t>‫סרטון‬</a:t>
             </a:r>
             <a:endParaRPr lang="he-IL" sz="1550" dirty="0"/>
           </a:p>
@@ -4354,7 +4354,7 @@
                 <a:ea typeface="Arial" pitchFamily="34" charset="-122"/>
                 <a:cs typeface="Arial" pitchFamily="34" charset="-120"/>
               </a:rPr>
-              <a:t>הסבר חזותי וקולי בקצב שלכם</a:t>
+              <a:t>‫הסבר חזותי וקולי בקצב שלכם‬</a:t>
             </a:r>
             <a:endParaRPr lang="he-IL" sz="1150" dirty="0"/>
           </a:p>
@@ -4464,7 +4464,7 @@
                 <a:ea typeface="Arial" pitchFamily="34" charset="-122"/>
                 <a:cs typeface="Arial" pitchFamily="34" charset="-120"/>
               </a:rPr>
-              <a:t>משחק לימודי</a:t>
+              <a:t>‫משחק לימודי‬</a:t>
             </a:r>
             <a:endParaRPr lang="he-IL" sz="1550" dirty="0"/>
           </a:p>
@@ -4503,7 +4503,7 @@
                 <a:ea typeface="Arial" pitchFamily="34" charset="-122"/>
                 <a:cs typeface="Arial" pitchFamily="34" charset="-120"/>
               </a:rPr>
-              <a:t>הופכים את החומר לחוויה אינטראקטיבית</a:t>
+              <a:t>‫הופכים את החומר לחוויה אינטראקטיבית‬</a:t>
             </a:r>
             <a:endParaRPr lang="he-IL" sz="1150" dirty="0"/>
           </a:p>
@@ -4613,7 +4613,7 @@
                 <a:ea typeface="Arial" pitchFamily="34" charset="-122"/>
                 <a:cs typeface="Arial" pitchFamily="34" charset="-120"/>
               </a:rPr>
-              <a:t>דגם תלת-ממדי</a:t>
+              <a:t>‫דגם תלת-ממדי‬</a:t>
             </a:r>
             <a:endParaRPr lang="he-IL" sz="1550" dirty="0"/>
           </a:p>
@@ -4652,7 +4652,7 @@
                 <a:ea typeface="Arial" pitchFamily="34" charset="-122"/>
                 <a:cs typeface="Arial" pitchFamily="34" charset="-120"/>
               </a:rPr>
-              <a:t>בונים DNA, תא או כרומוזום</a:t>
+              <a:t>‫בונים DNA, תא או כרומוזום‬</a:t>
             </a:r>
             <a:endParaRPr lang="he-IL" sz="1150" dirty="0"/>
           </a:p>
@@ -4762,7 +4762,7 @@
                 <a:ea typeface="Arial" pitchFamily="34" charset="-122"/>
                 <a:cs typeface="Arial" pitchFamily="34" charset="-120"/>
               </a:rPr>
-              <a:t>ציר זמן</a:t>
+              <a:t>‫ציר זמן‬</a:t>
             </a:r>
             <a:endParaRPr lang="he-IL" sz="1550" dirty="0"/>
           </a:p>
@@ -4801,7 +4801,7 @@
                 <a:ea typeface="Arial" pitchFamily="34" charset="-122"/>
                 <a:cs typeface="Arial" pitchFamily="34" charset="-120"/>
               </a:rPr>
-              <a:t>תגליות הגנטיקה לאורך השנים</a:t>
+              <a:t>‫תגליות הגנטיקה לאורך השנים‬</a:t>
             </a:r>
             <a:endParaRPr lang="he-IL" sz="1150" dirty="0"/>
           </a:p>
@@ -4911,7 +4911,7 @@
                 <a:ea typeface="Arial" pitchFamily="34" charset="-122"/>
                 <a:cs typeface="Arial" pitchFamily="34" charset="-120"/>
               </a:rPr>
-              <a:t>טבלת השוואה</a:t>
+              <a:t>‫טבלת השוואה‬</a:t>
             </a:r>
             <a:endParaRPr lang="he-IL" sz="1550" dirty="0"/>
           </a:p>
@@ -4950,7 +4950,7 @@
                 <a:ea typeface="Arial" pitchFamily="34" charset="-122"/>
                 <a:cs typeface="Arial" pitchFamily="34" charset="-120"/>
               </a:rPr>
-              <a:t>למשל: DNA מול RNA, דומיננטי מול רצסיבי</a:t>
+              <a:t>‫למשל: DNA מול RNA, דומיננטי מול רצסיבי‬</a:t>
             </a:r>
             <a:endParaRPr lang="he-IL" sz="1150" dirty="0"/>
           </a:p>
@@ -5011,7 +5011,7 @@
                 <a:ea typeface="Arial" pitchFamily="34" charset="-122"/>
                 <a:cs typeface="Arial" pitchFamily="34" charset="-120"/>
               </a:rPr>
-              <a:t>אפשר לעבוד לבד, בזוג או בקבוצה קטנה. לכל תוצר מצרפים קישור למקורות שבהם השתמשתם.</a:t>
+              <a:t>‫אפשר לעבוד לבד, בזוג או בקבוצה קטנה. לכל תוצר מצרפים קישור למקורות שבהם השתמשתם.‬</a:t>
             </a:r>
             <a:endParaRPr lang="he-IL" sz="1300" dirty="0"/>
           </a:p>
@@ -5121,7 +5121,7 @@
                 <a:ea typeface="Arial" pitchFamily="34" charset="-122"/>
                 <a:cs typeface="Arial" pitchFamily="34" charset="-120"/>
               </a:rPr>
-              <a:t>איך עובדים על התוצר?</a:t>
+              <a:t>‫איך עובדים על התוצר?‬</a:t>
             </a:r>
             <a:endParaRPr lang="he-IL" sz="3200" dirty="0"/>
           </a:p>
@@ -5228,7 +5228,7 @@
                 <a:ea typeface="Arial" pitchFamily="34" charset="-122"/>
                 <a:cs typeface="Arial" pitchFamily="34" charset="-120"/>
               </a:rPr>
-              <a:t>בוחרים</a:t>
+              <a:t>‫בוחרים‬</a:t>
             </a:r>
             <a:endParaRPr lang="he-IL" sz="1700" dirty="0"/>
           </a:p>
@@ -5267,7 +5267,7 @@
                 <a:ea typeface="Arial" pitchFamily="34" charset="-122"/>
                 <a:cs typeface="Arial" pitchFamily="34" charset="-120"/>
               </a:rPr>
-              <a:t>תוצר מלוח הבחירה שמתאים לחוזקות שלכם.</a:t>
+              <a:t>‫תוצר מלוח הבחירה שמתאים לחוזקות שלכם.‬</a:t>
             </a:r>
             <a:endParaRPr lang="he-IL" sz="1450" dirty="0"/>
           </a:p>
@@ -5374,7 +5374,7 @@
                 <a:ea typeface="Arial" pitchFamily="34" charset="-122"/>
                 <a:cs typeface="Arial" pitchFamily="34" charset="-120"/>
               </a:rPr>
-              <a:t>מתכננים</a:t>
+              <a:t>‫מתכננים‬</a:t>
             </a:r>
             <a:endParaRPr lang="he-IL" sz="1700" dirty="0"/>
           </a:p>
@@ -5413,7 +5413,7 @@
                 <a:ea typeface="Arial" pitchFamily="34" charset="-122"/>
                 <a:cs typeface="Arial" pitchFamily="34" charset="-120"/>
               </a:rPr>
-              <a:t>מגדירים מטרה, מחלקים את העבודה לשלבים וקובעים לוח זמנים.</a:t>
+              <a:t>‫מגדירים מטרה, מחלקים את העבודה לשלבים וקובעים לוח זמנים.‬</a:t>
             </a:r>
             <a:endParaRPr lang="he-IL" sz="1450" dirty="0"/>
           </a:p>
@@ -5520,7 +5520,7 @@
                 <a:ea typeface="Arial" pitchFamily="34" charset="-122"/>
                 <a:cs typeface="Arial" pitchFamily="34" charset="-120"/>
               </a:rPr>
-              <a:t>עובדים ובודקים</a:t>
+              <a:t>‫עובדים ובודקים‬</a:t>
             </a:r>
             <a:endParaRPr lang="he-IL" sz="1700" dirty="0"/>
           </a:p>
@@ -5559,7 +5559,7 @@
                 <a:ea typeface="Arial" pitchFamily="34" charset="-122"/>
                 <a:cs typeface="Arial" pitchFamily="34" charset="-120"/>
               </a:rPr>
-              <a:t>משווים את עצמכם למחוון תוך כדי העבודה, ומשנים כיוון אם צריך.</a:t>
+              <a:t>‫משווים את עצמכם למחוון תוך כדי העבודה, ומשנים כיוון אם צריך.‬</a:t>
             </a:r>
             <a:endParaRPr lang="he-IL" sz="1450" dirty="0"/>
           </a:p>
@@ -5666,7 +5666,7 @@
                 <a:ea typeface="Arial" pitchFamily="34" charset="-122"/>
                 <a:cs typeface="Arial" pitchFamily="34" charset="-120"/>
               </a:rPr>
-              <a:t>מציגים ומשתפים</a:t>
+              <a:t>‫מציגים ומשתפים‬</a:t>
             </a:r>
             <a:endParaRPr lang="he-IL" sz="1700" dirty="0"/>
           </a:p>
@@ -5705,7 +5705,7 @@
                 <a:ea typeface="Arial" pitchFamily="34" charset="-122"/>
                 <a:cs typeface="Arial" pitchFamily="34" charset="-120"/>
               </a:rPr>
-              <a:t>מציגים לכיתה, נותנים משוב לחברים ומקבלים משוב בחזרה.</a:t>
+              <a:t>‫מציגים לכיתה, נותנים משוב לחברים ומקבלים משוב בחזרה.‬</a:t>
             </a:r>
             <a:endParaRPr lang="he-IL" sz="1450" dirty="0"/>
           </a:p>
@@ -5744,7 +5744,7 @@
                 <a:ea typeface="Arial" pitchFamily="34" charset="-122"/>
                 <a:cs typeface="Arial" pitchFamily="34" charset="-120"/>
               </a:rPr>
-              <a:t>ובסוף הדרך, שאלה אחת לעצמכם: מה עבד לי טוב, ומה אעשה אחרת בפעם הבאה?</a:t>
+              <a:t>‫ובסוף הדרך, שאלה אחת לעצמכם: מה עבד לי טוב, ומה אעשה אחרת בפעם הבאה?‬</a:t>
             </a:r>
             <a:endParaRPr lang="he-IL" sz="1500" dirty="0"/>
           </a:p>
@@ -5854,7 +5854,7 @@
                 <a:ea typeface="Arial" pitchFamily="34" charset="-122"/>
                 <a:cs typeface="Arial" pitchFamily="34" charset="-120"/>
               </a:rPr>
-              <a:t>חכמים ברשת: מקורות ו-AI</a:t>
+              <a:t>‫חכמים ברשת: מקורות ו-AI‬</a:t>
             </a:r>
             <a:endParaRPr lang="he-IL" sz="3200" dirty="0"/>
           </a:p>
@@ -5964,7 +5964,7 @@
                 <a:ea typeface="Arial" pitchFamily="34" charset="-122"/>
                 <a:cs typeface="Arial" pitchFamily="34" charset="-120"/>
               </a:rPr>
-              <a:t>לפני שמשתמשים במידע</a:t>
+              <a:t>‫לפני שמשתמשים במידע‬</a:t>
             </a:r>
             <a:endParaRPr lang="he-IL" sz="1800" dirty="0"/>
           </a:p>
@@ -6047,7 +6047,7 @@
                 <a:ea typeface="Arial" pitchFamily="34" charset="-122"/>
                 <a:cs typeface="Arial" pitchFamily="34" charset="-120"/>
               </a:rPr>
-              <a:t>בודקים מי כתב אותו ומטעם איזה גוף.</a:t>
+              <a:t>‫בודקים מי כתב אותו ומטעם איזה גוף.‬</a:t>
             </a:r>
             <a:endParaRPr lang="he-IL" sz="1350" dirty="0"/>
           </a:p>
@@ -6130,7 +6130,7 @@
                 <a:ea typeface="Arial" pitchFamily="34" charset="-122"/>
                 <a:cs typeface="Arial" pitchFamily="34" charset="-120"/>
               </a:rPr>
-              <a:t>בודקים מתי הוא עודכן לאחרונה.</a:t>
+              <a:t>‫בודקים מתי הוא עודכן לאחרונה.‬</a:t>
             </a:r>
             <a:endParaRPr lang="he-IL" sz="1350" dirty="0"/>
           </a:p>
@@ -6213,7 +6213,7 @@
                 <a:ea typeface="Arial" pitchFamily="34" charset="-122"/>
                 <a:cs typeface="Arial" pitchFamily="34" charset="-120"/>
               </a:rPr>
-              <a:t>משווים: האם מקור נוסף אומר אותו דבר?</a:t>
+              <a:t>‫משווים: האם מקור נוסף אומר אותו דבר?‬</a:t>
             </a:r>
             <a:endParaRPr lang="he-IL" sz="1350" dirty="0"/>
           </a:p>
@@ -6296,7 +6296,7 @@
                 <a:ea typeface="Arial" pitchFamily="34" charset="-122"/>
                 <a:cs typeface="Arial" pitchFamily="34" charset="-120"/>
               </a:rPr>
-              <a:t>שומרים את הקישור ומצרפים אותו לתוצר.</a:t>
+              <a:t>‫שומרים את הקישור ומצרפים אותו לתוצר.‬</a:t>
             </a:r>
             <a:endParaRPr lang="he-IL" sz="1350" dirty="0"/>
           </a:p>
@@ -6406,7 +6406,7 @@
                 <a:ea typeface="Arial" pitchFamily="34" charset="-122"/>
                 <a:cs typeface="Arial" pitchFamily="34" charset="-120"/>
               </a:rPr>
-              <a:t>עובדים עם AI כמו מקצוענים</a:t>
+              <a:t>‫עובדים עם AI כמו מקצוענים‬</a:t>
             </a:r>
             <a:endParaRPr lang="he-IL" sz="1800" dirty="0"/>
           </a:p>
@@ -6489,7 +6489,7 @@
                 <a:ea typeface="Arial" pitchFamily="34" charset="-122"/>
                 <a:cs typeface="Arial" pitchFamily="34" charset="-120"/>
               </a:rPr>
-              <a:t>AI עוזר לרעיונות, לארגון המידע ולניסוח.</a:t>
+              <a:t>‫AI עוזר לרעיונות, לארגון המידע ולניסוח.‬</a:t>
             </a:r>
             <a:endParaRPr lang="he-IL" sz="1350" dirty="0"/>
           </a:p>
@@ -6572,7 +6572,7 @@
                 <a:ea typeface="Arial" pitchFamily="34" charset="-122"/>
                 <a:cs typeface="Arial" pitchFamily="34" charset="-120"/>
               </a:rPr>
-              <a:t>הוא לא מחליף את ההבנה שלכם.</a:t>
+              <a:t>‫הוא לא מחליף את ההבנה שלכם.‬</a:t>
             </a:r>
             <a:endParaRPr lang="he-IL" sz="1350" dirty="0"/>
           </a:p>
@@ -6655,7 +6655,7 @@
                 <a:ea typeface="Arial" pitchFamily="34" charset="-122"/>
                 <a:cs typeface="Arial" pitchFamily="34" charset="-120"/>
               </a:rPr>
-              <a:t>כל תשובה שלו בודקים מול מקור אמין.</a:t>
+              <a:t>‫כל תשובה שלו בודקים מול מקור אמין.‬</a:t>
             </a:r>
             <a:endParaRPr lang="he-IL" sz="1350" dirty="0"/>
           </a:p>
@@ -6738,7 +6738,7 @@
                 <a:ea typeface="Arial" pitchFamily="34" charset="-122"/>
                 <a:cs typeface="Arial" pitchFamily="34" charset="-120"/>
               </a:rPr>
-              <a:t>מספרים בתוצר במה בדיוק נעזרתם.</a:t>
+              <a:t>‫מספרים בתוצר במה בדיוק נעזרתם.‬</a:t>
             </a:r>
             <a:endParaRPr lang="he-IL" sz="1350" dirty="0"/>
           </a:p>
@@ -7734,7 +7734,7 @@
                 <a:ea typeface="Arial" pitchFamily="34" charset="-122"/>
                 <a:cs typeface="Arial" pitchFamily="34" charset="-120"/>
               </a:rPr>
-              <a:t>יוצאים לדרך!</a:t>
+              <a:t>‫יוצאים לדרך!‬</a:t>
             </a:r>
             <a:endParaRPr lang="he-IL" sz="4000" dirty="0"/>
           </a:p>
@@ -7826,7 +7826,7 @@
                   </a:extLst>
                 </a:hlinkClick>
               </a:rPr>
-              <a:t>צופים בטריילר בתחילת השיעור</a:t>
+              <a:t>‫צופים בטריילר בתחילת השיעור‬</a:t>
             </a:r>
             <a:endParaRPr lang="he-IL" sz="1900" dirty="0"/>
           </a:p>
@@ -7918,7 +7918,7 @@
                   </a:extLst>
                 </a:hlinkClick>
               </a:rPr>
-              <a:t>בוחרים תוצר מלוח הבחירה</a:t>
+              <a:t>‫בוחרים תוצר מלוח הבחירה‬</a:t>
             </a:r>
             <a:endParaRPr lang="he-IL" sz="1900" dirty="0"/>
           </a:p>
@@ -8001,7 +8001,7 @@
                 <a:ea typeface="Arial" pitchFamily="34" charset="-122"/>
                 <a:cs typeface="Arial" pitchFamily="34" charset="-120"/>
               </a:rPr>
-              <a:t>מתכננים שלבים ולוח זמנים</a:t>
+              <a:t>‫מתכננים שלבים ולוח זמנים‬</a:t>
             </a:r>
             <a:endParaRPr lang="he-IL" sz="1900" dirty="0"/>
           </a:p>
@@ -8084,7 +8084,7 @@
                 <a:ea typeface="Arial" pitchFamily="34" charset="-122"/>
                 <a:cs typeface="Arial" pitchFamily="34" charset="-120"/>
               </a:rPr>
-              <a:t>בודקים מקורות ומצרפים קישורים</a:t>
+              <a:t>‫בודקים מקורות ומצרפים קישורים‬</a:t>
             </a:r>
             <a:endParaRPr lang="he-IL" sz="1900" dirty="0"/>
           </a:p>
@@ -8167,7 +8167,7 @@
                 <a:ea typeface="Arial" pitchFamily="34" charset="-122"/>
                 <a:cs typeface="Arial" pitchFamily="34" charset="-120"/>
               </a:rPr>
-              <a:t>מציגים, משתפים ונהנים</a:t>
+              <a:t>‫מציגים, משתפים ונהנים‬</a:t>
             </a:r>
             <a:endParaRPr lang="he-IL" sz="1900" dirty="0"/>
           </a:p>
@@ -8206,7 +8206,7 @@
                 <a:ea typeface="Arial" pitchFamily="34" charset="-122"/>
                 <a:cs typeface="Arial" pitchFamily="34" charset="-120"/>
               </a:rPr>
-              <a:t>בהצלחה! אנחנו כבר סקרנים לראות מה תיצרו.</a:t>
+              <a:t>‫בהצלחה! אנחנו כבר סקרנים לראות מה תיצרו.‬</a:t>
             </a:r>
             <a:endParaRPr lang="he-IL" sz="1800" dirty="0"/>
           </a:p>
@@ -8316,7 +8316,7 @@
                 <a:ea typeface="Arial" pitchFamily="34" charset="-122"/>
                 <a:cs typeface="Arial" pitchFamily="34" charset="-120"/>
               </a:rPr>
-              <a:t>רשימת מקורות</a:t>
+              <a:t>‫רשימת מקורות‬</a:t>
             </a:r>
             <a:endParaRPr lang="he-IL" sz="3200" dirty="0"/>
           </a:p>
@@ -8355,7 +8355,7 @@
                 <a:ea typeface="Arial" pitchFamily="34" charset="-122"/>
                 <a:cs typeface="Arial" pitchFamily="34" charset="-120"/>
               </a:rPr>
-              <a:t>אייל, ל׳, והלוש-מנסקר, ע׳ (בפרסום). פרקטיקות הוראה מקדמות אסטרטגיות הכוונה עצמית בלמידה.</a:t>
+              <a:t>‫אייל, ל׳, והלוש-מנסקר, ע׳ (בפרסום). פרקטיקות הוראה מקדמות אסטרטגיות הכוונה עצמית בלמידה.‬</a:t>
             </a:r>
             <a:endParaRPr lang="he-IL" sz="1400" dirty="0"/>
           </a:p>
@@ -8394,7 +8394,7 @@
                 <a:ea typeface="Arial" pitchFamily="34" charset="-122"/>
                 <a:cs typeface="Arial" pitchFamily="34" charset="-120"/>
               </a:rPr>
-              <a:t>משרד החינוך. (2020). מצפן 2030: דמות הבוגר/ת והיערכות מערכת החינוך.</a:t>
+              <a:t>‫משרד החינוך. (2020). מצפן 2030: דמות הבוגר/ת והיערכות מערכת החינוך.‬</a:t>
             </a:r>
             <a:endParaRPr lang="he-IL" sz="1400" dirty="0"/>
           </a:p>
@@ -8567,7 +8567,7 @@
                 <a:ea typeface="Arial" pitchFamily="34" charset="-122"/>
                 <a:cs typeface="Arial" pitchFamily="34" charset="-120"/>
               </a:rPr>
-              <a:t>הטריילר ולוח הבחירה הוכנו על ידינו במסגרת היחידה.</a:t>
+              <a:t>‫הטריילר ולוח הבחירה הוכנו על ידינו במסגרת היחידה.‬</a:t>
             </a:r>
             <a:endParaRPr lang="he-IL" sz="1300" dirty="0"/>
           </a:p>
@@ -8677,7 +8677,7 @@
                 <a:ea typeface="Arial" pitchFamily="34" charset="-122"/>
                 <a:cs typeface="Arial" pitchFamily="34" charset="-120"/>
               </a:rPr>
-              <a:t>רגע לפני שמתחילים...</a:t>
+              <a:t>‫רגע לפני שמתחילים...‬</a:t>
             </a:r>
             <a:endParaRPr lang="he-IL" sz="3200" dirty="0"/>
           </a:p>
@@ -8716,7 +8716,7 @@
                 <a:ea typeface="Arial" pitchFamily="34" charset="-122"/>
                 <a:cs typeface="Arial" pitchFamily="34" charset="-120"/>
               </a:rPr>
-              <a:t>הכנו לכם טריילר קצר שמציג את מה שמחכה לכם ביחידה</a:t>
+              <a:t>‫הכנו לכם טריילר קצר שמציג את מה שמחכה לכם ביחידה‬</a:t>
             </a:r>
             <a:endParaRPr lang="he-IL" sz="1600" dirty="0"/>
           </a:p>
@@ -8841,7 +8841,7 @@
                   </a:extLst>
                 </a:hlinkClick>
               </a:rPr>
-              <a:t>לחצו כאן לצפייה בטריילר</a:t>
+              <a:t>‫לחצו כאן לצפייה בטריילר‬</a:t>
             </a:r>
             <a:endParaRPr lang="he-IL" sz="2000" dirty="0"/>
           </a:p>
@@ -8880,7 +8880,7 @@
                 <a:ea typeface="Arial" pitchFamily="34" charset="-122"/>
                 <a:cs typeface="Arial" pitchFamily="34" charset="-120"/>
               </a:rPr>
-              <a:t>צפו יחד בתחילת השיעור. אחרי הצפייה נדבר: מה סיקרן אתכם הכי הרבה?</a:t>
+              <a:t>‫צפו יחד בתחילת השיעור. אחרי הצפייה נדבר: מה סיקרן אתכם הכי הרבה?‬</a:t>
             </a:r>
             <a:endParaRPr lang="he-IL" sz="1500" dirty="0"/>
           </a:p>
@@ -8990,7 +8990,7 @@
                 <a:ea typeface="Arial" pitchFamily="34" charset="-122"/>
                 <a:cs typeface="Arial" pitchFamily="34" charset="-120"/>
               </a:rPr>
-              <a:t>מה מחכה לנו ביחידה?</a:t>
+              <a:t>‫מה מחכה לנו ביחידה?‬</a:t>
             </a:r>
             <a:endParaRPr lang="he-IL" sz="3200" dirty="0"/>
           </a:p>
@@ -9073,7 +9073,7 @@
                 <a:ea typeface="Arial" pitchFamily="34" charset="-122"/>
                 <a:cs typeface="Arial" pitchFamily="34" charset="-120"/>
               </a:rPr>
-              <a:t>נגלה מה זה DNA, איך הוא בנוי ואיפה הוא מסתתר בגוף.</a:t>
+              <a:t>‫נגלה מה זה DNA, איך הוא בנוי ואיפה הוא מסתתר בגוף.‬</a:t>
             </a:r>
             <a:endParaRPr lang="he-IL" sz="1800" dirty="0"/>
           </a:p>
@@ -9156,7 +9156,7 @@
                 <a:ea typeface="Arial" pitchFamily="34" charset="-122"/>
                 <a:cs typeface="Arial" pitchFamily="34" charset="-120"/>
               </a:rPr>
-              <a:t>נבין למה אנחנו דומים להורים שלנו: תורשה, גנים ותכונות.</a:t>
+              <a:t>‫נבין למה אנחנו דומים להורים שלנו: תורשה, גנים ותכונות.‬</a:t>
             </a:r>
             <a:endParaRPr lang="he-IL" sz="1800" dirty="0"/>
           </a:p>
@@ -9239,7 +9239,7 @@
                 <a:ea typeface="Arial" pitchFamily="34" charset="-122"/>
                 <a:cs typeface="Arial" pitchFamily="34" charset="-120"/>
               </a:rPr>
-              <a:t>נכיר מוטציות והנדסה גנטית, ונראה מה הן עושות בעולם האמיתי.</a:t>
+              <a:t>‫נכיר מוטציות והנדסה גנטית, ונראה מה הן עושות בעולם האמיתי.‬</a:t>
             </a:r>
             <a:endParaRPr lang="he-IL" sz="1800" dirty="0"/>
           </a:p>
@@ -9322,7 +9322,7 @@
                 <a:ea typeface="Arial" pitchFamily="34" charset="-122"/>
                 <a:cs typeface="Arial" pitchFamily="34" charset="-120"/>
               </a:rPr>
-              <a:t>ובסוף: אתם בוחרים איך להציג את מה שלמדתם, מתוך לוח בחירה.</a:t>
+              <a:t>‫ובסוף: אתם בוחרים איך להציג את מה שלמדתם, מתוך לוח בחירה.‬</a:t>
             </a:r>
             <a:endParaRPr lang="he-IL" sz="1800" dirty="0"/>
           </a:p>
@@ -10260,7 +10260,7 @@
                   </a:extLst>
                 </a:hlinkClick>
               </a:rPr>
-              <a:t>קפיצה ישירה ללוח הבחירה</a:t>
+              <a:t>‫קפיצה ישירה ללוח הבחירה‬</a:t>
             </a:r>
             <a:endParaRPr lang="he-IL" sz="1400" dirty="0"/>
           </a:p>
@@ -10370,7 +10370,7 @@
                 <a:ea typeface="Arial" pitchFamily="34" charset="-122"/>
                 <a:cs typeface="Arial" pitchFamily="34" charset="-120"/>
               </a:rPr>
-              <a:t>מה זה בכלל גנטיקה?</a:t>
+              <a:t>‫מה זה בכלל גנטיקה?‬</a:t>
             </a:r>
             <a:endParaRPr lang="he-IL" sz="3200" dirty="0"/>
           </a:p>
@@ -10480,7 +10480,7 @@
                 <a:ea typeface="Arial" pitchFamily="34" charset="-122"/>
                 <a:cs typeface="Arial" pitchFamily="34" charset="-120"/>
               </a:rPr>
-              <a:t>למה יש לך צבע עיניים</a:t>
+              <a:t>‫למה יש לך צבע עיניים‬</a:t>
             </a:r>
             <a:endParaRPr lang="he-IL" sz="1500" dirty="0"/>
           </a:p>
@@ -10497,7 +10497,7 @@
                 <a:ea typeface="Arial" pitchFamily="34" charset="-122"/>
                 <a:cs typeface="Arial" pitchFamily="34" charset="-120"/>
               </a:rPr>
-              <a:t>כמו של אמא?</a:t>
+              <a:t>‫כמו של אמא?‬</a:t>
             </a:r>
             <a:endParaRPr lang="he-IL" sz="1500" dirty="0"/>
           </a:p>
@@ -10607,7 +10607,7 @@
                 <a:ea typeface="Arial" pitchFamily="34" charset="-122"/>
                 <a:cs typeface="Arial" pitchFamily="34" charset="-120"/>
               </a:rPr>
-              <a:t>למה אחים דומים,</a:t>
+              <a:t>‫למה אחים דומים,‬</a:t>
             </a:r>
             <a:endParaRPr lang="he-IL" sz="1500" dirty="0"/>
           </a:p>
@@ -10624,7 +10624,7 @@
                 <a:ea typeface="Arial" pitchFamily="34" charset="-122"/>
                 <a:cs typeface="Arial" pitchFamily="34" charset="-120"/>
               </a:rPr>
-              <a:t>אבל אף פעם לא זהים?</a:t>
+              <a:t>‫אבל אף פעם לא זהים?‬</a:t>
             </a:r>
             <a:endParaRPr lang="he-IL" sz="1500" dirty="0"/>
           </a:p>
@@ -10734,7 +10734,7 @@
                 <a:ea typeface="Arial" pitchFamily="34" charset="-122"/>
                 <a:cs typeface="Arial" pitchFamily="34" charset="-120"/>
               </a:rPr>
-              <a:t>איך מזהים אדם</a:t>
+              <a:t>‫איך מזהים אדם‬</a:t>
             </a:r>
             <a:endParaRPr lang="he-IL" sz="1500" dirty="0"/>
           </a:p>
@@ -10751,7 +10751,7 @@
                 <a:ea typeface="Arial" pitchFamily="34" charset="-122"/>
                 <a:cs typeface="Arial" pitchFamily="34" charset="-120"/>
               </a:rPr>
-              <a:t>לפי שערה אחת?</a:t>
+              <a:t>‫לפי שערה אחת?‬</a:t>
             </a:r>
             <a:endParaRPr lang="he-IL" sz="1500" dirty="0"/>
           </a:p>
@@ -10856,7 +10856,7 @@
                 <a:ea typeface="Arial" pitchFamily="34" charset="-122"/>
                 <a:cs typeface="Arial" pitchFamily="34" charset="-120"/>
               </a:rPr>
-              <a:t>גנטיקה היא תחום במדע שחוקר איך תכונות עוברות בתורשה, מהורים לילדים.</a:t>
+              <a:t>‫גנטיקה היא תחום במדע שחוקר איך תכונות עוברות בתורשה, מהורים לילדים.‬</a:t>
             </a:r>
             <a:endParaRPr lang="he-IL" sz="1800" dirty="0"/>
           </a:p>
@@ -10895,7 +10895,7 @@
                 <a:ea typeface="Arial" pitchFamily="34" charset="-122"/>
                 <a:cs typeface="Arial" pitchFamily="34" charset="-120"/>
               </a:rPr>
-              <a:t>התשובות לכל השאלות האלה מסתתרות במולקולה קטנה אחת: DNA. בואו נכיר אותה.</a:t>
+              <a:t>‫התשובות לכל השאלות האלה מסתתרות במולקולה קטנה אחת: DNA. בואו נכיר אותה.‬</a:t>
             </a:r>
             <a:endParaRPr lang="he-IL" sz="1600" dirty="0"/>
           </a:p>
@@ -11005,7 +11005,7 @@
                 <a:ea typeface="Arial" pitchFamily="34" charset="-122"/>
                 <a:cs typeface="Arial" pitchFamily="34" charset="-120"/>
               </a:rPr>
-              <a:t>איפה מסתתר הצופן?</a:t>
+              <a:t>‫איפה מסתתר הצופן?‬</a:t>
             </a:r>
             <a:endParaRPr lang="he-IL" sz="3200" dirty="0"/>
           </a:p>
@@ -11044,7 +11044,7 @@
                 <a:ea typeface="Arial" pitchFamily="34" charset="-122"/>
                 <a:cs typeface="Arial" pitchFamily="34" charset="-120"/>
               </a:rPr>
-              <a:t>מתקרבים פנימה, שלב אחרי שלב</a:t>
+              <a:t>‫מתקרבים פנימה, שלב אחרי שלב‬</a:t>
             </a:r>
             <a:endParaRPr lang="he-IL" sz="1600" dirty="0"/>
           </a:p>
@@ -11127,7 +11127,7 @@
                 <a:ea typeface="Arial" pitchFamily="34" charset="-122"/>
                 <a:cs typeface="Arial" pitchFamily="34" charset="-120"/>
               </a:rPr>
-              <a:t>הגוף</a:t>
+              <a:t>‫הגוף‬</a:t>
             </a:r>
             <a:endParaRPr lang="he-IL" sz="1600" dirty="0"/>
           </a:p>
@@ -11166,7 +11166,7 @@
                 <a:ea typeface="Arial" pitchFamily="34" charset="-122"/>
                 <a:cs typeface="Arial" pitchFamily="34" charset="-120"/>
               </a:rPr>
-              <a:t>טריליוני תאים</a:t>
+              <a:t>‫טריליוני תאים‬</a:t>
             </a:r>
             <a:endParaRPr lang="he-IL" sz="1150" dirty="0"/>
           </a:p>
@@ -11275,7 +11275,7 @@
                 <a:ea typeface="Arial" pitchFamily="34" charset="-122"/>
                 <a:cs typeface="Arial" pitchFamily="34" charset="-120"/>
               </a:rPr>
-              <a:t>התא</a:t>
+              <a:t>‫התא‬</a:t>
             </a:r>
             <a:endParaRPr lang="he-IL" sz="1600" dirty="0"/>
           </a:p>
@@ -11314,7 +11314,7 @@
                 <a:ea typeface="Arial" pitchFamily="34" charset="-122"/>
                 <a:cs typeface="Arial" pitchFamily="34" charset="-120"/>
               </a:rPr>
-              <a:t>יחידת החיים</a:t>
+              <a:t>‫יחידת החיים‬</a:t>
             </a:r>
             <a:endParaRPr lang="he-IL" sz="1150" dirty="0"/>
           </a:p>
@@ -11423,7 +11423,7 @@
                 <a:ea typeface="Arial" pitchFamily="34" charset="-122"/>
                 <a:cs typeface="Arial" pitchFamily="34" charset="-120"/>
               </a:rPr>
-              <a:t>הגרעין</a:t>
+              <a:t>‫הגרעין‬</a:t>
             </a:r>
             <a:endParaRPr lang="he-IL" sz="1600" dirty="0"/>
           </a:p>
@@ -11462,7 +11462,7 @@
                 <a:ea typeface="Arial" pitchFamily="34" charset="-122"/>
                 <a:cs typeface="Arial" pitchFamily="34" charset="-120"/>
               </a:rPr>
-              <a:t>מרכז הבקרה</a:t>
+              <a:t>‫מרכז הבקרה‬</a:t>
             </a:r>
             <a:endParaRPr lang="he-IL" sz="1150" dirty="0"/>
           </a:p>
@@ -11571,7 +11571,7 @@
                 <a:ea typeface="Arial" pitchFamily="34" charset="-122"/>
                 <a:cs typeface="Arial" pitchFamily="34" charset="-120"/>
               </a:rPr>
-              <a:t>כרומוזום</a:t>
+              <a:t>‫כרומוזום‬</a:t>
             </a:r>
             <a:endParaRPr lang="he-IL" sz="1600" dirty="0"/>
           </a:p>
@@ -11610,7 +11610,7 @@
                 <a:ea typeface="Arial" pitchFamily="34" charset="-122"/>
                 <a:cs typeface="Arial" pitchFamily="34" charset="-120"/>
               </a:rPr>
-              <a:t>46 בכל תא</a:t>
+              <a:t>‫46 בכל תא‬</a:t>
             </a:r>
             <a:endParaRPr lang="he-IL" sz="1150" dirty="0"/>
           </a:p>
@@ -11719,7 +11719,7 @@
                 <a:ea typeface="Arial" pitchFamily="34" charset="-122"/>
                 <a:cs typeface="Arial" pitchFamily="34" charset="-120"/>
               </a:rPr>
-              <a:t>DNA</a:t>
+              <a:t>‫DNA‬</a:t>
             </a:r>
             <a:endParaRPr lang="he-IL" sz="1600" dirty="0"/>
           </a:p>
@@ -11758,7 +11758,7 @@
                 <a:ea typeface="Arial" pitchFamily="34" charset="-122"/>
                 <a:cs typeface="Arial" pitchFamily="34" charset="-120"/>
               </a:rPr>
-              <a:t>הסולם המפותל</a:t>
+              <a:t>‫הסולם המפותל‬</a:t>
             </a:r>
             <a:endParaRPr lang="he-IL" sz="1150" dirty="0"/>
           </a:p>
@@ -11867,7 +11867,7 @@
                 <a:ea typeface="Arial" pitchFamily="34" charset="-122"/>
                 <a:cs typeface="Arial" pitchFamily="34" charset="-120"/>
               </a:rPr>
-              <a:t>גן</a:t>
+              <a:t>‫גן‬</a:t>
             </a:r>
             <a:endParaRPr lang="he-IL" sz="1600" dirty="0"/>
           </a:p>
@@ -11906,7 +11906,7 @@
                 <a:ea typeface="Arial" pitchFamily="34" charset="-122"/>
                 <a:cs typeface="Arial" pitchFamily="34" charset="-120"/>
               </a:rPr>
-              <a:t>הוראה לתכונה אחת</a:t>
+              <a:t>‫הוראה לתכונה אחת‬</a:t>
             </a:r>
             <a:endParaRPr lang="he-IL" sz="1150" dirty="0"/>
           </a:p>
@@ -11945,7 +11945,7 @@
                 <a:ea typeface="Arial" pitchFamily="34" charset="-122"/>
                 <a:cs typeface="Arial" pitchFamily="34" charset="-120"/>
               </a:rPr>
-              <a:t>בתוך כל תא בגוף שלכם נמצא עותק מלא של כל ההוראות. מדהים, לא?</a:t>
+              <a:t>‫בתוך כל תא בגוף שלכם נמצא עותק מלא של כל ההוראות. מדהים, לא?‬</a:t>
             </a:r>
             <a:endParaRPr lang="he-IL" sz="1500" dirty="0"/>
           </a:p>
@@ -12055,7 +12055,7 @@
                 <a:ea typeface="Arial" pitchFamily="34" charset="-122"/>
                 <a:cs typeface="Arial" pitchFamily="34" charset="-120"/>
               </a:rPr>
-              <a:t>שפת ה-DNA: ארבע אותיות בלבד</a:t>
+              <a:t>‫שפת ה-DNA: ארבע אותיות בלבד‬</a:t>
             </a:r>
             <a:endParaRPr lang="he-IL" sz="3200" dirty="0"/>
           </a:p>
@@ -12094,7 +12094,7 @@
                 <a:ea typeface="Arial" pitchFamily="34" charset="-122"/>
                 <a:cs typeface="Arial" pitchFamily="34" charset="-120"/>
               </a:rPr>
-              <a:t>ה-DNA נראה כמו סולם מפותל. כל שלב בסולם בנוי מזוג "אותיות" כימיות.</a:t>
+              <a:t>‫ה-DNA נראה כמו סולם מפותל. כל שלב בסולם בנוי מזוג "אותיות" כימיות.‬</a:t>
             </a:r>
             <a:endParaRPr lang="he-IL" sz="1700" dirty="0"/>
           </a:p>
@@ -12133,7 +12133,7 @@
                 <a:ea typeface="Arial" pitchFamily="34" charset="-122"/>
                 <a:cs typeface="Arial" pitchFamily="34" charset="-120"/>
               </a:rPr>
-              <a:t>יש רק ארבע אותיות: A, T, G, C. הסדר שלהן הוא הצופן, וכולו יחד הוא ספר הוראות שלם לבניית הגוף ולהפעלתו.</a:t>
+              <a:t>‫יש רק ארבע אותיות: A, T, G, C. הסדר שלהן הוא הצופן, וכולו יחד הוא ספר הוראות שלם לבניית הגוף ולהפעלתו.‬</a:t>
             </a:r>
             <a:endParaRPr lang="he-IL" sz="1700" dirty="0"/>
           </a:p>
@@ -12172,7 +12172,7 @@
                 <a:ea typeface="Arial" pitchFamily="34" charset="-122"/>
                 <a:cs typeface="Arial" pitchFamily="34" charset="-120"/>
               </a:rPr>
-              <a:t>חוק הזיווג: A מתחברת תמיד אל T, ‏ו-G מתחברת תמיד אל C.</a:t>
+              <a:t>‫חוק הזיווג: A מתחברת תמיד אל T, ‏ו-G מתחברת תמיד אל C.‬</a:t>
             </a:r>
             <a:endParaRPr lang="he-IL" sz="1700" dirty="0"/>
           </a:p>
@@ -12277,7 +12277,7 @@
                 <a:ea typeface="Arial" pitchFamily="34" charset="-122"/>
                 <a:cs typeface="Arial" pitchFamily="34" charset="-120"/>
               </a:rPr>
-              <a:t>ידעתם? אם מותחים את ה-DNA שבתא אחד בלבד, מקבלים חוט באורך של כ-2 מטרים!</a:t>
+              <a:t>‫ידעתם? אם מותחים את ה-DNA שבתא אחד בלבד, מקבלים חוט באורך של כ-2 מטרים!‬</a:t>
             </a:r>
             <a:endParaRPr lang="he-IL" sz="1450" dirty="0"/>
           </a:p>
@@ -12839,7 +12839,7 @@
                 <a:ea typeface="Arial" pitchFamily="34" charset="-122"/>
                 <a:cs typeface="Arial" pitchFamily="34" charset="-120"/>
               </a:rPr>
-              <a:t>DNA מול RNA: מה ההבדל?</a:t>
+              <a:t>‫DNA מול RNA: מה ההבדל?‬</a:t>
             </a:r>
             <a:endParaRPr lang="he-IL" sz="3200" dirty="0"/>
           </a:p>
@@ -13010,7 +13010,7 @@
                 <a:ea typeface="Arial" pitchFamily="34" charset="-122"/>
                 <a:cs typeface="Arial" pitchFamily="34" charset="-120"/>
               </a:rPr>
-              <a:t>שני גדילים, בצורת סולם מפותל</a:t>
+              <a:t>‫שני גדילים, בצורת סולם מפותל‬</a:t>
             </a:r>
             <a:endParaRPr lang="he-IL" sz="1500" dirty="0"/>
           </a:p>
@@ -13049,7 +13049,7 @@
                 <a:ea typeface="Arial" pitchFamily="34" charset="-122"/>
                 <a:cs typeface="Arial" pitchFamily="34" charset="-120"/>
               </a:rPr>
-              <a:t>נשאר בתוך הגרעין</a:t>
+              <a:t>‫נשאר בתוך הגרעין‬</a:t>
             </a:r>
             <a:endParaRPr lang="he-IL" sz="1500" dirty="0"/>
           </a:p>
@@ -13088,7 +13088,7 @@
                 <a:ea typeface="Arial" pitchFamily="34" charset="-122"/>
                 <a:cs typeface="Arial" pitchFamily="34" charset="-120"/>
               </a:rPr>
-              <a:t>שומר את כל המידע לאורך זמן</a:t>
+              <a:t>‫שומר את כל המידע לאורך זמן‬</a:t>
             </a:r>
             <a:endParaRPr lang="he-IL" sz="1500" dirty="0"/>
           </a:p>
@@ -13127,7 +13127,7 @@
                 <a:ea typeface="Arial" pitchFamily="34" charset="-122"/>
                 <a:cs typeface="Arial" pitchFamily="34" charset="-120"/>
               </a:rPr>
-              <a:t>האותיות שלו: A T G C</a:t>
+              <a:t>‫האותיות שלו: A T G C‬</a:t>
             </a:r>
             <a:endParaRPr lang="he-IL" sz="1500" dirty="0"/>
           </a:p>
@@ -13298,7 +13298,7 @@
                 <a:ea typeface="Arial" pitchFamily="34" charset="-122"/>
                 <a:cs typeface="Arial" pitchFamily="34" charset="-120"/>
               </a:rPr>
-              <a:t>גדיל אחד בלבד</a:t>
+              <a:t>‫גדיל אחד בלבד‬</a:t>
             </a:r>
             <a:endParaRPr lang="he-IL" sz="1500" dirty="0"/>
           </a:p>
@@ -13337,7 +13337,7 @@
                 <a:ea typeface="Arial" pitchFamily="34" charset="-122"/>
                 <a:cs typeface="Arial" pitchFamily="34" charset="-120"/>
               </a:rPr>
-              <a:t>יוצא מהגרעין אל התא</a:t>
+              <a:t>‫יוצא מהגרעין אל התא‬</a:t>
             </a:r>
             <a:endParaRPr lang="he-IL" sz="1500" dirty="0"/>
           </a:p>
@@ -13376,7 +13376,7 @@
                 <a:ea typeface="Arial" pitchFamily="34" charset="-122"/>
                 <a:cs typeface="Arial" pitchFamily="34" charset="-120"/>
               </a:rPr>
-              <a:t>שליח: מעתיק הוראה ומעביר הלאה</a:t>
+              <a:t>‫שליח: מעתיק הוראה ומעביר הלאה‬</a:t>
             </a:r>
             <a:endParaRPr lang="he-IL" sz="1500" dirty="0"/>
           </a:p>
@@ -13415,7 +13415,7 @@
                 <a:ea typeface="Arial" pitchFamily="34" charset="-122"/>
                 <a:cs typeface="Arial" pitchFamily="34" charset="-120"/>
               </a:rPr>
-              <a:t>במקום T יש לו U</a:t>
+              <a:t>‫במקום T יש לו U‬</a:t>
             </a:r>
             <a:endParaRPr lang="he-IL" sz="1500" dirty="0"/>
           </a:p>
@@ -13476,7 +13476,7 @@
                 <a:ea typeface="Arial" pitchFamily="34" charset="-122"/>
                 <a:cs typeface="Arial" pitchFamily="34" charset="-120"/>
               </a:rPr>
-              <a:t>דרך קלה לזכור: ה-DNA הוא הספרייה, וה-RNA הוא העותק המצולם של דף אחד שיוצא ממנה.</a:t>
+              <a:t>‫דרך קלה לזכור: ה-DNA הוא הספרייה, וה-RNA הוא העותק המצולם של דף אחד שיוצא ממנה.‬</a:t>
             </a:r>
             <a:endParaRPr lang="he-IL" sz="1500" dirty="0"/>
           </a:p>
@@ -13586,7 +13586,7 @@
                 <a:ea typeface="Arial" pitchFamily="34" charset="-122"/>
                 <a:cs typeface="Arial" pitchFamily="34" charset="-120"/>
               </a:rPr>
-              <a:t>תכונה חזקה, תכונה שקטה</a:t>
+              <a:t>‫תכונה חזקה, תכונה שקטה‬</a:t>
             </a:r>
             <a:endParaRPr lang="he-IL" sz="3200" dirty="0"/>
           </a:p>
@@ -13625,7 +13625,7 @@
                 <a:ea typeface="Arial" pitchFamily="34" charset="-122"/>
                 <a:cs typeface="Arial" pitchFamily="34" charset="-120"/>
               </a:rPr>
-              <a:t>כל תכונה מגיעה בשני עותקים: אחד מאבא ואחד מאמא</a:t>
+              <a:t>‫כל תכונה מגיעה בשני עותקים: אחד מאבא ואחד מאמא‬</a:t>
             </a:r>
             <a:endParaRPr lang="he-IL" sz="1600" dirty="0"/>
           </a:p>
@@ -13713,7 +13713,7 @@
                 <a:ea typeface="Arial" pitchFamily="34" charset="-122"/>
                 <a:cs typeface="Arial" pitchFamily="34" charset="-120"/>
               </a:rPr>
-              <a:t>תכונה דומיננטית ("חזקה")</a:t>
+              <a:t>‫תכונה דומיננטית ("חזקה")‬</a:t>
             </a:r>
             <a:endParaRPr lang="en-US" sz="1900" dirty="0"/>
           </a:p>
@@ -13752,7 +13752,7 @@
                 <a:ea typeface="Arial" pitchFamily="34" charset="-122"/>
                 <a:cs typeface="Arial" pitchFamily="34" charset="-120"/>
               </a:rPr>
-              <a:t>מספיק עותק אחד שלה כדי שהיא תופיע אצלכם.</a:t>
+              <a:t>‫מספיק עותק אחד שלה כדי שהיא תופיע אצלכם.‬</a:t>
             </a:r>
             <a:endParaRPr lang="he-IL" sz="1550" dirty="0"/>
           </a:p>
@@ -13791,7 +13791,7 @@
                 <a:ea typeface="Arial" pitchFamily="34" charset="-122"/>
                 <a:cs typeface="Arial" pitchFamily="34" charset="-120"/>
               </a:rPr>
-              <a:t>דוגמה: עיניים חומות.</a:t>
+              <a:t>‫דוגמה: עיניים חומות.‬</a:t>
             </a:r>
             <a:endParaRPr lang="he-IL" sz="1450" dirty="0"/>
           </a:p>
@@ -13879,7 +13879,7 @@
                 <a:ea typeface="Arial" pitchFamily="34" charset="-122"/>
                 <a:cs typeface="Arial" pitchFamily="34" charset="-120"/>
               </a:rPr>
-              <a:t>תכונה רצסיבית ("שקטה")</a:t>
+              <a:t>‫תכונה רצסיבית ("שקטה")‬</a:t>
             </a:r>
             <a:endParaRPr lang="en-US" sz="1900" dirty="0"/>
           </a:p>
@@ -13918,7 +13918,7 @@
                 <a:ea typeface="Arial" pitchFamily="34" charset="-122"/>
                 <a:cs typeface="Arial" pitchFamily="34" charset="-120"/>
               </a:rPr>
-              <a:t>מופיעה רק כששני העותקים שקיבלתם הם שלה.</a:t>
+              <a:t>‫מופיעה רק כששני העותקים שקיבלתם הם שלה.‬</a:t>
             </a:r>
             <a:endParaRPr lang="he-IL" sz="1550" dirty="0"/>
           </a:p>
@@ -13957,7 +13957,7 @@
                 <a:ea typeface="Arial" pitchFamily="34" charset="-122"/>
                 <a:cs typeface="Arial" pitchFamily="34" charset="-120"/>
               </a:rPr>
-              <a:t>דוגמה: עיניים כחולות.</a:t>
+              <a:t>‫דוגמה: עיניים כחולות.‬</a:t>
             </a:r>
             <a:endParaRPr lang="he-IL" sz="1450" dirty="0"/>
           </a:p>
@@ -14062,7 +14062,7 @@
                 <a:ea typeface="Arial" pitchFamily="34" charset="-122"/>
                 <a:cs typeface="Arial" pitchFamily="34" charset="-120"/>
               </a:rPr>
-              <a:t>ולכן: שני הורים עם עיניים חומות יכולים לקבל ילד עם עיניים כחולות. לכל אחד מהם היה עותק "שקט", ושניהם העבירו אותו הלאה.</a:t>
+              <a:t>‫ולכן: שני הורים עם עיניים חומות יכולים לקבל ילד עם עיניים כחולות. לכל אחד מהם היה עותק "שקט", ושניהם העבירו אותו הלאה.‬</a:t>
             </a:r>
             <a:endParaRPr lang="he-IL" sz="1500" dirty="0"/>
           </a:p>
@@ -14172,7 +14172,7 @@
                 <a:ea typeface="Arial" pitchFamily="34" charset="-122"/>
                 <a:cs typeface="Arial" pitchFamily="34" charset="-120"/>
               </a:rPr>
-              <a:t>מוטציות: שינוי בצופן</a:t>
+              <a:t>‫מוטציות: שינוי בצופן‬</a:t>
             </a:r>
             <a:endParaRPr lang="he-IL" sz="3200" dirty="0"/>
           </a:p>
@@ -14211,7 +14211,7 @@
                 <a:ea typeface="Arial" pitchFamily="34" charset="-122"/>
                 <a:cs typeface="Arial" pitchFamily="34" charset="-120"/>
               </a:rPr>
-              <a:t>שינוי קטן ברצף האותיות של ה-DNA, כמו שגיאת הקלדה בספר ההוראות</a:t>
+              <a:t>‫שינוי קטן ברצף האותיות של ה-DNA, כמו שגיאת הקלדה בספר ההוראות‬</a:t>
             </a:r>
             <a:endParaRPr lang="he-IL" sz="1600" dirty="0"/>
           </a:p>
@@ -14321,7 +14321,7 @@
                 <a:ea typeface="Arial" pitchFamily="34" charset="-122"/>
                 <a:cs typeface="Arial" pitchFamily="34" charset="-120"/>
               </a:rPr>
-              <a:t>לרוב: לא קורה כלום</a:t>
+              <a:t>‫לרוב: לא קורה כלום‬</a:t>
             </a:r>
             <a:endParaRPr lang="he-IL" sz="1600" dirty="0"/>
           </a:p>
@@ -14360,7 +14360,7 @@
                 <a:ea typeface="Arial" pitchFamily="34" charset="-122"/>
                 <a:cs typeface="Arial" pitchFamily="34" charset="-120"/>
               </a:rPr>
-              <a:t>רוב המוטציות קטנות ולא מרגישים אותן בכלל.</a:t>
+              <a:t>‫רוב המוטציות קטנות ולא מרגישים אותן בכלל.‬</a:t>
             </a:r>
             <a:endParaRPr lang="he-IL" sz="1350" dirty="0"/>
           </a:p>
@@ -14470,7 +14470,7 @@
                 <a:ea typeface="Arial" pitchFamily="34" charset="-122"/>
                 <a:cs typeface="Arial" pitchFamily="34" charset="-120"/>
               </a:rPr>
-              <a:t>לפעמים: מזיקה</a:t>
+              <a:t>‫לפעמים: מזיקה‬</a:t>
             </a:r>
             <a:endParaRPr lang="he-IL" sz="1600" dirty="0"/>
           </a:p>
@@ -14509,7 +14509,7 @@
                 <a:ea typeface="Arial" pitchFamily="34" charset="-122"/>
                 <a:cs typeface="Arial" pitchFamily="34" charset="-120"/>
               </a:rPr>
-              <a:t>ההוראה משתבשת, וזה עלול לגרום למחלה.</a:t>
+              <a:t>‫ההוראה משתבשת, וזה עלול לגרום למחלה.‬</a:t>
             </a:r>
             <a:endParaRPr lang="he-IL" sz="1350" dirty="0"/>
           </a:p>
@@ -14619,7 +14619,7 @@
                 <a:ea typeface="Arial" pitchFamily="34" charset="-122"/>
                 <a:cs typeface="Arial" pitchFamily="34" charset="-120"/>
               </a:rPr>
-              <a:t>ולפעמים: דווקא מועילה</a:t>
+              <a:t>‫ולפעמים: דווקא מועילה‬</a:t>
             </a:r>
             <a:endParaRPr lang="he-IL" sz="1600" dirty="0"/>
           </a:p>
@@ -14658,7 +14658,7 @@
                 <a:ea typeface="Arial" pitchFamily="34" charset="-122"/>
                 <a:cs typeface="Arial" pitchFamily="34" charset="-120"/>
               </a:rPr>
-              <a:t>תכונה חדשה שעוזרת להסתדר טוב יותר בסביבה.</a:t>
+              <a:t>‫תכונה חדשה שעוזרת להסתדר טוב יותר בסביבה.‬</a:t>
             </a:r>
             <a:endParaRPr lang="he-IL" sz="1350" dirty="0"/>
           </a:p>
@@ -14719,7 +14719,7 @@
                 <a:ea typeface="Arial" pitchFamily="34" charset="-122"/>
                 <a:cs typeface="Arial" pitchFamily="34" charset="-120"/>
               </a:rPr>
-              <a:t>עובדה מגניבה: צבע העיניים הכחול התחיל כנראה ממוטציה אחת אצל אדם אחד, לפני אלפי שנים. כל כחולי העיניים בעולם ירשו אותה ממנו.</a:t>
+              <a:t>‫עובדה מגניבה: צבע העיניים הכחול התחיל כנראה ממוטציה אחת אצל אדם אחד, לפני אלפי שנים. כל כחולי העיניים בעולם ירשו אותה ממנו.‬</a:t>
             </a:r>
             <a:endParaRPr lang="he-IL" sz="1450" dirty="0"/>
           </a:p>
